--- a/level2/template.pptx
+++ b/level2/template.pptx
@@ -198,7 +198,7 @@
           <a:p>
             <a:fld id="{B157FD80-104E-477A-84DF-AAA7C9A1979B}" type="datetimeFigureOut">
               <a:rPr lang="en-ZA" smtClean="0"/>
-              <a:t>2026/06/19</a:t>
+              <a:t>2026/07/11</a:t>
             </a:fld>
             <a:endParaRPr lang="en-ZA"/>
           </a:p>
@@ -615,7 +615,7 @@
           <a:p>
             <a:fld id="{8353421B-4862-4D3A-B9AB-BA663EF3CA0D}" type="datetimeFigureOut">
               <a:rPr lang="en-ZA" smtClean="0"/>
-              <a:t>2026/06/19</a:t>
+              <a:t>2026/07/11</a:t>
             </a:fld>
             <a:endParaRPr lang="en-ZA"/>
           </a:p>
@@ -815,7 +815,7 @@
           <a:p>
             <a:fld id="{8353421B-4862-4D3A-B9AB-BA663EF3CA0D}" type="datetimeFigureOut">
               <a:rPr lang="en-ZA" smtClean="0"/>
-              <a:t>2026/06/19</a:t>
+              <a:t>2026/07/11</a:t>
             </a:fld>
             <a:endParaRPr lang="en-ZA"/>
           </a:p>
@@ -1025,7 +1025,7 @@
           <a:p>
             <a:fld id="{8353421B-4862-4D3A-B9AB-BA663EF3CA0D}" type="datetimeFigureOut">
               <a:rPr lang="en-ZA" smtClean="0"/>
-              <a:t>2026/06/19</a:t>
+              <a:t>2026/07/11</a:t>
             </a:fld>
             <a:endParaRPr lang="en-ZA"/>
           </a:p>
@@ -1506,7 +1506,7 @@
           <a:p>
             <a:fld id="{8353421B-4862-4D3A-B9AB-BA663EF3CA0D}" type="datetimeFigureOut">
               <a:rPr lang="en-ZA" smtClean="0"/>
-              <a:t>2026/06/19</a:t>
+              <a:t>2026/07/11</a:t>
             </a:fld>
             <a:endParaRPr lang="en-ZA"/>
           </a:p>
@@ -1782,7 +1782,7 @@
           <a:p>
             <a:fld id="{8353421B-4862-4D3A-B9AB-BA663EF3CA0D}" type="datetimeFigureOut">
               <a:rPr lang="en-ZA" smtClean="0"/>
-              <a:t>2026/06/19</a:t>
+              <a:t>2026/07/11</a:t>
             </a:fld>
             <a:endParaRPr lang="en-ZA"/>
           </a:p>
@@ -2050,7 +2050,7 @@
           <a:p>
             <a:fld id="{8353421B-4862-4D3A-B9AB-BA663EF3CA0D}" type="datetimeFigureOut">
               <a:rPr lang="en-ZA" smtClean="0"/>
-              <a:t>2026/06/19</a:t>
+              <a:t>2026/07/11</a:t>
             </a:fld>
             <a:endParaRPr lang="en-ZA"/>
           </a:p>
@@ -2465,7 +2465,7 @@
           <a:p>
             <a:fld id="{8353421B-4862-4D3A-B9AB-BA663EF3CA0D}" type="datetimeFigureOut">
               <a:rPr lang="en-ZA" smtClean="0"/>
-              <a:t>2026/06/19</a:t>
+              <a:t>2026/07/11</a:t>
             </a:fld>
             <a:endParaRPr lang="en-ZA"/>
           </a:p>
@@ -2607,7 +2607,7 @@
           <a:p>
             <a:fld id="{8353421B-4862-4D3A-B9AB-BA663EF3CA0D}" type="datetimeFigureOut">
               <a:rPr lang="en-ZA" smtClean="0"/>
-              <a:t>2026/06/19</a:t>
+              <a:t>2026/07/11</a:t>
             </a:fld>
             <a:endParaRPr lang="en-ZA"/>
           </a:p>
@@ -2720,7 +2720,7 @@
           <a:p>
             <a:fld id="{8353421B-4862-4D3A-B9AB-BA663EF3CA0D}" type="datetimeFigureOut">
               <a:rPr lang="en-ZA" smtClean="0"/>
-              <a:t>2026/06/19</a:t>
+              <a:t>2026/07/11</a:t>
             </a:fld>
             <a:endParaRPr lang="en-ZA"/>
           </a:p>
@@ -3033,7 +3033,7 @@
           <a:p>
             <a:fld id="{8353421B-4862-4D3A-B9AB-BA663EF3CA0D}" type="datetimeFigureOut">
               <a:rPr lang="en-ZA" smtClean="0"/>
-              <a:t>2026/06/19</a:t>
+              <a:t>2026/07/11</a:t>
             </a:fld>
             <a:endParaRPr lang="en-ZA"/>
           </a:p>
@@ -3322,7 +3322,7 @@
           <a:p>
             <a:fld id="{8353421B-4862-4D3A-B9AB-BA663EF3CA0D}" type="datetimeFigureOut">
               <a:rPr lang="en-ZA" smtClean="0"/>
-              <a:t>2026/06/19</a:t>
+              <a:t>2026/07/11</a:t>
             </a:fld>
             <a:endParaRPr lang="en-ZA"/>
           </a:p>
@@ -3575,7 +3575,7 @@
           <a:p>
             <a:fld id="{8353421B-4862-4D3A-B9AB-BA663EF3CA0D}" type="datetimeFigureOut">
               <a:rPr lang="en-ZA" smtClean="0"/>
-              <a:t>2026/06/19</a:t>
+              <a:t>2026/07/11</a:t>
             </a:fld>
             <a:endParaRPr lang="en-ZA"/>
           </a:p>
@@ -4040,10 +4040,10 @@
       </p:sp>
       <p:pic>
         <p:nvPicPr>
-          <p:cNvPr id="4" name="Picture 3">
-            <a:extLst>
-              <a:ext uri="{FF2B5EF4-FFF2-40B4-BE49-F238E27FC236}">
-                <a16:creationId xmlns:a16="http://schemas.microsoft.com/office/drawing/2014/main" id="{1DC2ABBC-EDAF-BC7E-4C08-81CF758A5285}"/>
+          <p:cNvPr id="6" name="Image 5">
+            <a:extLst>
+              <a:ext uri="{FF2B5EF4-FFF2-40B4-BE49-F238E27FC236}">
+                <a16:creationId xmlns:a16="http://schemas.microsoft.com/office/drawing/2014/main" id="{B17DF0D6-6A0F-4499-80A3-DADC4AAFBB8F}"/>
               </a:ext>
             </a:extLst>
           </p:cNvPr>
@@ -4054,15 +4054,14 @@
         </p:nvPicPr>
         <p:blipFill>
           <a:blip r:embed="rId2"/>
-          <a:srcRect b="16322"/>
           <a:stretch>
             <a:fillRect/>
           </a:stretch>
         </p:blipFill>
         <p:spPr>
           <a:xfrm>
-            <a:off x="1" y="0"/>
-            <a:ext cx="9144000" cy="5048042"/>
+            <a:off x="0" y="1"/>
+            <a:ext cx="9144000" cy="5143500"/>
           </a:xfrm>
           <a:prstGeom prst="rect">
             <a:avLst/>
